--- a/3차 프로젝트 발표 자료 - 2022180037 임용호.pptx
+++ b/3차 프로젝트 발표 자료 - 2022180037 임용호.pptx
@@ -260,7 +260,7 @@
           <a:p>
             <a:fld id="{999E2F89-41A6-47D1-B12C-335FAA75E062}" type="datetimeFigureOut">
               <a:rPr lang="ko-KR" altLang="en-US" smtClean="0"/>
-              <a:t>2025-12-06</a:t>
+              <a:t>2025-12-07</a:t>
             </a:fld>
             <a:endParaRPr lang="ko-KR" altLang="en-US"/>
           </a:p>
@@ -458,7 +458,7 @@
           <a:p>
             <a:fld id="{999E2F89-41A6-47D1-B12C-335FAA75E062}" type="datetimeFigureOut">
               <a:rPr lang="ko-KR" altLang="en-US" smtClean="0"/>
-              <a:t>2025-12-06</a:t>
+              <a:t>2025-12-07</a:t>
             </a:fld>
             <a:endParaRPr lang="ko-KR" altLang="en-US"/>
           </a:p>
@@ -666,7 +666,7 @@
           <a:p>
             <a:fld id="{999E2F89-41A6-47D1-B12C-335FAA75E062}" type="datetimeFigureOut">
               <a:rPr lang="ko-KR" altLang="en-US" smtClean="0"/>
-              <a:t>2025-12-06</a:t>
+              <a:t>2025-12-07</a:t>
             </a:fld>
             <a:endParaRPr lang="ko-KR" altLang="en-US"/>
           </a:p>
@@ -864,7 +864,7 @@
           <a:p>
             <a:fld id="{999E2F89-41A6-47D1-B12C-335FAA75E062}" type="datetimeFigureOut">
               <a:rPr lang="ko-KR" altLang="en-US" smtClean="0"/>
-              <a:t>2025-12-06</a:t>
+              <a:t>2025-12-07</a:t>
             </a:fld>
             <a:endParaRPr lang="ko-KR" altLang="en-US"/>
           </a:p>
@@ -1139,7 +1139,7 @@
           <a:p>
             <a:fld id="{999E2F89-41A6-47D1-B12C-335FAA75E062}" type="datetimeFigureOut">
               <a:rPr lang="ko-KR" altLang="en-US" smtClean="0"/>
-              <a:t>2025-12-06</a:t>
+              <a:t>2025-12-07</a:t>
             </a:fld>
             <a:endParaRPr lang="ko-KR" altLang="en-US"/>
           </a:p>
@@ -1404,7 +1404,7 @@
           <a:p>
             <a:fld id="{999E2F89-41A6-47D1-B12C-335FAA75E062}" type="datetimeFigureOut">
               <a:rPr lang="ko-KR" altLang="en-US" smtClean="0"/>
-              <a:t>2025-12-06</a:t>
+              <a:t>2025-12-07</a:t>
             </a:fld>
             <a:endParaRPr lang="ko-KR" altLang="en-US"/>
           </a:p>
@@ -1816,7 +1816,7 @@
           <a:p>
             <a:fld id="{999E2F89-41A6-47D1-B12C-335FAA75E062}" type="datetimeFigureOut">
               <a:rPr lang="ko-KR" altLang="en-US" smtClean="0"/>
-              <a:t>2025-12-06</a:t>
+              <a:t>2025-12-07</a:t>
             </a:fld>
             <a:endParaRPr lang="ko-KR" altLang="en-US"/>
           </a:p>
@@ -1957,7 +1957,7 @@
           <a:p>
             <a:fld id="{999E2F89-41A6-47D1-B12C-335FAA75E062}" type="datetimeFigureOut">
               <a:rPr lang="ko-KR" altLang="en-US" smtClean="0"/>
-              <a:t>2025-12-06</a:t>
+              <a:t>2025-12-07</a:t>
             </a:fld>
             <a:endParaRPr lang="ko-KR" altLang="en-US"/>
           </a:p>
@@ -2070,7 +2070,7 @@
           <a:p>
             <a:fld id="{999E2F89-41A6-47D1-B12C-335FAA75E062}" type="datetimeFigureOut">
               <a:rPr lang="ko-KR" altLang="en-US" smtClean="0"/>
-              <a:t>2025-12-06</a:t>
+              <a:t>2025-12-07</a:t>
             </a:fld>
             <a:endParaRPr lang="ko-KR" altLang="en-US"/>
           </a:p>
@@ -2381,7 +2381,7 @@
           <a:p>
             <a:fld id="{999E2F89-41A6-47D1-B12C-335FAA75E062}" type="datetimeFigureOut">
               <a:rPr lang="ko-KR" altLang="en-US" smtClean="0"/>
-              <a:t>2025-12-06</a:t>
+              <a:t>2025-12-07</a:t>
             </a:fld>
             <a:endParaRPr lang="ko-KR" altLang="en-US"/>
           </a:p>
@@ -2669,7 +2669,7 @@
           <a:p>
             <a:fld id="{999E2F89-41A6-47D1-B12C-335FAA75E062}" type="datetimeFigureOut">
               <a:rPr lang="ko-KR" altLang="en-US" smtClean="0"/>
-              <a:t>2025-12-06</a:t>
+              <a:t>2025-12-07</a:t>
             </a:fld>
             <a:endParaRPr lang="ko-KR" altLang="en-US"/>
           </a:p>
@@ -2910,7 +2910,7 @@
           <a:p>
             <a:fld id="{999E2F89-41A6-47D1-B12C-335FAA75E062}" type="datetimeFigureOut">
               <a:rPr lang="ko-KR" altLang="en-US" smtClean="0"/>
-              <a:t>2025-12-06</a:t>
+              <a:t>2025-12-07</a:t>
             </a:fld>
             <a:endParaRPr lang="ko-KR" altLang="en-US"/>
           </a:p>
@@ -3342,14 +3342,14 @@
           <p:nvPr>
             <p:extLst>
               <p:ext uri="{D42A27DB-BD31-4B8C-83A1-F6EECF244321}">
-                <p14:modId xmlns:p14="http://schemas.microsoft.com/office/powerpoint/2010/main" val="1549188265"/>
+                <p14:modId xmlns:p14="http://schemas.microsoft.com/office/powerpoint/2010/main" val="2825404850"/>
               </p:ext>
             </p:extLst>
           </p:nvPr>
         </p:nvGraphicFramePr>
         <p:xfrm>
           <a:off x="191729" y="127656"/>
-          <a:ext cx="11808542" cy="5501640"/>
+          <a:ext cx="11808542" cy="6050280"/>
         </p:xfrm>
         <a:graphic>
           <a:graphicData uri="http://schemas.openxmlformats.org/drawingml/2006/table">
@@ -3609,6 +3609,35 @@
                         <a:rPr lang="ko-KR" altLang="en-US" dirty="0"/>
                         <a:t> 점프 도중 방향 전환 어려움</a:t>
                       </a:r>
+                      <a:r>
+                        <a:rPr lang="en-US" altLang="ko-KR" dirty="0"/>
+                        <a:t>. </a:t>
+                      </a:r>
+                      <a:r>
+                        <a:rPr lang="ko-KR" altLang="en-US" dirty="0"/>
+                        <a:t>방향키 입력 없이 </a:t>
+                      </a:r>
+                      <a:r>
+                        <a:rPr lang="ko-KR" altLang="en-US" dirty="0" err="1"/>
+                        <a:t>대쉬</a:t>
+                      </a:r>
+                      <a:r>
+                        <a:rPr lang="ko-KR" altLang="en-US" dirty="0"/>
+                        <a:t> 시 이동이</a:t>
+                      </a:r>
+                      <a:endParaRPr lang="en-US" altLang="ko-KR" dirty="0"/>
+                    </a:p>
+                    <a:p>
+                      <a:pPr latinLnBrk="1"/>
+                      <a:r>
+                        <a:rPr lang="ko-KR" altLang="en-US" dirty="0"/>
+                        <a:t>지속되는 경우가 발생</a:t>
+                      </a:r>
+                      <a:r>
+                        <a:rPr lang="en-US" altLang="ko-KR" dirty="0"/>
+                        <a:t>.</a:t>
+                      </a:r>
+                      <a:endParaRPr lang="ko-KR" altLang="en-US" dirty="0"/>
                     </a:p>
                   </a:txBody>
                   <a:tcPr anchor="ctr"/>
@@ -3621,7 +3650,7 @@
                       <a:pPr latinLnBrk="1"/>
                       <a:r>
                         <a:rPr lang="en-US" altLang="ko-KR" dirty="0"/>
-                        <a:t>95%</a:t>
+                        <a:t>90%</a:t>
                       </a:r>
                       <a:endParaRPr lang="ko-KR" altLang="en-US" dirty="0"/>
                     </a:p>
@@ -3905,6 +3934,11 @@
                         <a:rPr lang="ko-KR" altLang="en-US" dirty="0"/>
                         <a:t>사운드가 종종 끊기는 경우가 발생</a:t>
                       </a:r>
+                      <a:r>
+                        <a:rPr lang="en-US" altLang="ko-KR" dirty="0"/>
+                        <a:t>.</a:t>
+                      </a:r>
+                      <a:endParaRPr lang="ko-KR" altLang="en-US" dirty="0"/>
                     </a:p>
                   </a:txBody>
                   <a:tcPr anchor="ctr"/>
@@ -3917,7 +3951,7 @@
                       <a:pPr latinLnBrk="1"/>
                       <a:r>
                         <a:rPr lang="en-US" altLang="ko-KR" dirty="0"/>
-                        <a:t>90%</a:t>
+                        <a:t>95%</a:t>
                       </a:r>
                       <a:endParaRPr lang="ko-KR" altLang="en-US" dirty="0"/>
                     </a:p>
